--- a/Courses/145060/units/unit-05-collections-files-real-data/04-slides/exports/MCCTC_145060_Slides_W11_CSVAndCleaning.pptx
+++ b/Courses/145060/units/unit-05-collections-files-real-data/04-slides/exports/MCCTC_145060_Slides_W11_CSVAndCleaning.pptx
@@ -617,7 +617,7 @@
           <a:p>
             <a:r>
               <a:rPr lang="en-US" dirty="0"/>
-              <a:t>Build one is the Hoodie Order lab. The real messy sheet, with every problem on slide one and a few more. You produce the printer's count by size and color, the treasurer's paid and unpaid totals, a clean CSV, a JSON file, and a needs a person list with line numbers. Build two opens the data pipeline project. Pick your data source and write down every kind of mess in it before you write any code.</a:t>
+              <a:t>Build one is the Hoodie Order lab. The real messy sheet, with every problem on slide one and a few more. You produce the printer's count by size and color, the treasurer's paid and unpaid totals, a clean CSV, a JSON file, and a needs a person list with line numbers. Build two is the finish line for text adventure version three. Finish your tests and README, then demo it to a partner and break your save three ways. It is due at the end of the block.</a:t>
             </a:r>
             <a:endParaRPr lang="en-US" dirty="0"/>
           </a:p>
@@ -1862,7 +1862,7 @@
         </p:blipFill>
         <p:spPr>
           <a:xfrm>
-            <a:off x="0" y="0"/>
+            <a:off x="7619809" y="0"/>
             <a:ext cx="4571886" cy="6858000"/>
           </a:xfrm>
           <a:prstGeom prst="rect">
@@ -1878,8 +1878,8 @@
         </p:nvSpPr>
         <p:spPr>
           <a:xfrm>
-            <a:off x="5233360" y="595511"/>
-            <a:ext cx="6296860" cy="1181298"/>
+            <a:off x="661475" y="550565"/>
+            <a:ext cx="6296860" cy="1144389"/>
           </a:xfrm>
           <a:prstGeom prst="rect">
             <a:avLst/>
@@ -1900,7 +1900,7 @@
               <a:buNone/>
             </a:pPr>
             <a:r>
-              <a:rPr lang="en-US" sz="3700" b="1" dirty="0">
+              <a:rPr lang="en-US" sz="3600" b="1" dirty="0">
                 <a:solidFill>
                   <a:srgbClr val="111111"/>
                 </a:solidFill>
@@ -1910,7 +1910,7 @@
               </a:rPr>
               <a:t>What you are about to build</a:t>
             </a:r>
-            <a:endParaRPr lang="en-US" sz="3700" dirty="0"/>
+            <a:endParaRPr lang="en-US" sz="3600" dirty="0"/>
           </a:p>
         </p:txBody>
       </p:sp>
@@ -1922,8 +1922,8 @@
         </p:nvSpPr>
         <p:spPr>
           <a:xfrm>
-            <a:off x="5233360" y="2060277"/>
-            <a:ext cx="378014" cy="236240"/>
+            <a:off x="661475" y="1960959"/>
+            <a:ext cx="366207" cy="228798"/>
           </a:xfrm>
           <a:prstGeom prst="rect">
             <a:avLst/>
@@ -1942,7 +1942,7 @@
               <a:buNone/>
             </a:pPr>
             <a:r>
-              <a:rPr lang="en-US" sz="1450" dirty="0">
+              <a:rPr lang="en-US" sz="1400" dirty="0">
                 <a:solidFill>
                   <a:srgbClr val="1C1C1C"/>
                 </a:solidFill>
@@ -1952,7 +1952,7 @@
               </a:rPr>
               <a:t>01</a:t>
             </a:r>
-            <a:endParaRPr lang="en-US" sz="1450" dirty="0"/>
+            <a:endParaRPr lang="en-US" sz="1400" dirty="0"/>
           </a:p>
         </p:txBody>
       </p:sp>
@@ -1964,7 +1964,7 @@
         </p:nvSpPr>
         <p:spPr>
           <a:xfrm>
-            <a:off x="5233360" y="2356148"/>
+            <a:off x="661475" y="2246709"/>
             <a:ext cx="6296860" cy="25400"/>
           </a:xfrm>
           <a:prstGeom prst="rect">
@@ -1984,8 +1984,8 @@
         </p:nvSpPr>
         <p:spPr>
           <a:xfrm>
-            <a:off x="5233360" y="2501404"/>
-            <a:ext cx="6296860" cy="295275"/>
+            <a:off x="661475" y="2388989"/>
+            <a:ext cx="6296860" cy="286048"/>
           </a:xfrm>
           <a:prstGeom prst="rect">
             <a:avLst/>
@@ -2004,7 +2004,7 @@
               <a:buNone/>
             </a:pPr>
             <a:r>
-              <a:rPr lang="en-US" sz="1850" b="1" dirty="0">
+              <a:rPr lang="en-US" sz="1800" b="1" dirty="0">
                 <a:solidFill>
                   <a:srgbClr val="1C1C1C"/>
                 </a:solidFill>
@@ -2014,7 +2014,7 @@
               </a:rPr>
               <a:t>Lab U5-04: the hoodie order cleanup</a:t>
             </a:r>
-            <a:endParaRPr lang="en-US" sz="1850" dirty="0"/>
+            <a:endParaRPr lang="en-US" sz="1800" dirty="0"/>
           </a:p>
         </p:txBody>
       </p:sp>
@@ -2026,8 +2026,8 @@
         </p:nvSpPr>
         <p:spPr>
           <a:xfrm>
-            <a:off x="5233360" y="3127375"/>
-            <a:ext cx="378014" cy="236240"/>
+            <a:off x="661475" y="2989659"/>
+            <a:ext cx="366207" cy="228798"/>
           </a:xfrm>
           <a:prstGeom prst="rect">
             <a:avLst/>
@@ -2046,7 +2046,7 @@
               <a:buNone/>
             </a:pPr>
             <a:r>
-              <a:rPr lang="en-US" sz="1450" dirty="0">
+              <a:rPr lang="en-US" sz="1400" dirty="0">
                 <a:solidFill>
                   <a:srgbClr val="1C1C1C"/>
                 </a:solidFill>
@@ -2056,7 +2056,7 @@
               </a:rPr>
               <a:t>02</a:t>
             </a:r>
-            <a:endParaRPr lang="en-US" sz="1450" dirty="0"/>
+            <a:endParaRPr lang="en-US" sz="1400" dirty="0"/>
           </a:p>
         </p:txBody>
       </p:sp>
@@ -2068,7 +2068,7 @@
         </p:nvSpPr>
         <p:spPr>
           <a:xfrm>
-            <a:off x="5233360" y="3423245"/>
+            <a:off x="661475" y="3275409"/>
             <a:ext cx="6296860" cy="25400"/>
           </a:xfrm>
           <a:prstGeom prst="rect">
@@ -2088,8 +2088,8 @@
         </p:nvSpPr>
         <p:spPr>
           <a:xfrm>
-            <a:off x="5233360" y="3568502"/>
-            <a:ext cx="6296860" cy="295275"/>
+            <a:off x="661475" y="3417689"/>
+            <a:ext cx="6296860" cy="286048"/>
           </a:xfrm>
           <a:prstGeom prst="rect">
             <a:avLst/>
@@ -2108,7 +2108,7 @@
               <a:buNone/>
             </a:pPr>
             <a:r>
-              <a:rPr lang="en-US" sz="1850" b="1" dirty="0">
+              <a:rPr lang="en-US" sz="1800" b="1" dirty="0">
                 <a:solidFill>
                   <a:srgbClr val="1C1C1C"/>
                 </a:solidFill>
@@ -2118,7 +2118,7 @@
               </a:rPr>
               <a:t>Clean 23 messy rows into a printer order</a:t>
             </a:r>
-            <a:endParaRPr lang="en-US" sz="1850" dirty="0"/>
+            <a:endParaRPr lang="en-US" sz="1800" dirty="0"/>
           </a:p>
         </p:txBody>
       </p:sp>
@@ -2130,8 +2130,8 @@
         </p:nvSpPr>
         <p:spPr>
           <a:xfrm>
-            <a:off x="5233360" y="4194473"/>
-            <a:ext cx="378014" cy="236240"/>
+            <a:off x="661475" y="4018359"/>
+            <a:ext cx="366207" cy="228798"/>
           </a:xfrm>
           <a:prstGeom prst="rect">
             <a:avLst/>
@@ -2150,7 +2150,7 @@
               <a:buNone/>
             </a:pPr>
             <a:r>
-              <a:rPr lang="en-US" sz="1450" dirty="0">
+              <a:rPr lang="en-US" sz="1400" dirty="0">
                 <a:solidFill>
                   <a:srgbClr val="1C1C1C"/>
                 </a:solidFill>
@@ -2160,7 +2160,7 @@
               </a:rPr>
               <a:t>03</a:t>
             </a:r>
-            <a:endParaRPr lang="en-US" sz="1450" dirty="0"/>
+            <a:endParaRPr lang="en-US" sz="1400" dirty="0"/>
           </a:p>
         </p:txBody>
       </p:sp>
@@ -2172,7 +2172,7 @@
         </p:nvSpPr>
         <p:spPr>
           <a:xfrm>
-            <a:off x="5233360" y="4490343"/>
+            <a:off x="661475" y="4304109"/>
             <a:ext cx="6296860" cy="25400"/>
           </a:xfrm>
           <a:prstGeom prst="rect">
@@ -2192,8 +2192,8 @@
         </p:nvSpPr>
         <p:spPr>
           <a:xfrm>
-            <a:off x="5233360" y="4635599"/>
-            <a:ext cx="6296860" cy="295275"/>
+            <a:off x="661475" y="4446389"/>
+            <a:ext cx="6296860" cy="286048"/>
           </a:xfrm>
           <a:prstGeom prst="rect">
             <a:avLst/>
@@ -2212,7 +2212,7 @@
               <a:buNone/>
             </a:pPr>
             <a:r>
-              <a:rPr lang="en-US" sz="1850" b="1" dirty="0">
+              <a:rPr lang="en-US" sz="1800" b="1" dirty="0">
                 <a:solidFill>
                   <a:srgbClr val="1C1C1C"/>
                 </a:solidFill>
@@ -2222,7 +2222,7 @@
               </a:rPr>
               <a:t>Convert to clean CSV and JSON</a:t>
             </a:r>
-            <a:endParaRPr lang="en-US" sz="1850" dirty="0"/>
+            <a:endParaRPr lang="en-US" sz="1800" dirty="0"/>
           </a:p>
         </p:txBody>
       </p:sp>
@@ -2234,8 +2234,8 @@
         </p:nvSpPr>
         <p:spPr>
           <a:xfrm>
-            <a:off x="5233360" y="5261570"/>
-            <a:ext cx="378014" cy="236240"/>
+            <a:off x="661475" y="5047059"/>
+            <a:ext cx="366207" cy="228798"/>
           </a:xfrm>
           <a:prstGeom prst="rect">
             <a:avLst/>
@@ -2254,7 +2254,7 @@
               <a:buNone/>
             </a:pPr>
             <a:r>
-              <a:rPr lang="en-US" sz="1450" dirty="0">
+              <a:rPr lang="en-US" sz="1400" dirty="0">
                 <a:solidFill>
                   <a:srgbClr val="1C1C1C"/>
                 </a:solidFill>
@@ -2264,7 +2264,7 @@
               </a:rPr>
               <a:t>04</a:t>
             </a:r>
-            <a:endParaRPr lang="en-US" sz="1450" dirty="0"/>
+            <a:endParaRPr lang="en-US" sz="1400" dirty="0"/>
           </a:p>
         </p:txBody>
       </p:sp>
@@ -2276,7 +2276,7 @@
         </p:nvSpPr>
         <p:spPr>
           <a:xfrm>
-            <a:off x="5233360" y="5557441"/>
+            <a:off x="661475" y="5332809"/>
             <a:ext cx="6296860" cy="25400"/>
           </a:xfrm>
           <a:prstGeom prst="rect">
@@ -2296,17 +2296,19 @@
         </p:nvSpPr>
         <p:spPr>
           <a:xfrm>
-            <a:off x="5233360" y="5702697"/>
-            <a:ext cx="6296860" cy="295275"/>
-          </a:xfrm>
-          <a:prstGeom prst="rect">
-            <a:avLst/>
-          </a:prstGeom>
-          <a:noFill/>
-          <a:ln/>
-        </p:spPr>
-        <p:txBody>
-          <a:bodyPr wrap="none" lIns="0" tIns="0" rIns="0" bIns="0" rtlCol="0" anchor="t"/>
+            <a:off x="661475" y="5475089"/>
+            <a:ext cx="6296860" cy="572095"/>
+          </a:xfrm>
+          <a:prstGeom prst="rect">
+            <a:avLst/>
+          </a:prstGeom>
+          <a:noFill/>
+          <a:ln/>
+        </p:spPr>
+        <p:txBody>
+          <a:bodyPr wrap="square" lIns="0" tIns="0" rIns="0" bIns="0" rtlCol="0" anchor="t">
+            <a:normAutofit/>
+          </a:bodyPr>
           <a:lstStyle/>
           <a:p>
             <a:pPr algn="l" indent="0" marL="0">
@@ -2316,7 +2318,7 @@
               <a:buNone/>
             </a:pPr>
             <a:r>
-              <a:rPr lang="en-US" sz="1850" b="1" dirty="0">
+              <a:rPr lang="en-US" sz="1800" b="1" dirty="0">
                 <a:solidFill>
                   <a:srgbClr val="1C1C1C"/>
                 </a:solidFill>
@@ -2324,9 +2326,9 @@
                 <a:ea typeface="Orbitron Bold" pitchFamily="34" charset="-122"/>
                 <a:cs typeface="Orbitron Bold" pitchFamily="34" charset="-120"/>
               </a:rPr>
-              <a:t>Build 2: data pipeline Define and Measure</a:t>
-            </a:r>
-            <a:endParaRPr lang="en-US" sz="1850" dirty="0"/>
+              <a:t>Build 2: text adventure v3 due, with paired demos</a:t>
+            </a:r>
+            <a:endParaRPr lang="en-US" sz="1800" dirty="0"/>
           </a:p>
         </p:txBody>
       </p:sp>
@@ -2338,7 +2340,7 @@
         </p:nvSpPr>
         <p:spPr>
           <a:xfrm>
-            <a:off x="4704141" y="6457255"/>
+            <a:off x="132255" y="6457255"/>
             <a:ext cx="3640642" cy="158750"/>
           </a:xfrm>
           <a:prstGeom prst="rect">
@@ -2413,7 +2415,7 @@
         </p:blipFill>
         <p:spPr>
           <a:xfrm>
-            <a:off x="0" y="0"/>
+            <a:off x="7619809" y="0"/>
             <a:ext cx="4571886" cy="6858000"/>
           </a:xfrm>
           <a:prstGeom prst="rect">
@@ -2429,7 +2431,7 @@
         </p:nvSpPr>
         <p:spPr>
           <a:xfrm>
-            <a:off x="5233360" y="722610"/>
+            <a:off x="661475" y="722610"/>
             <a:ext cx="6296860" cy="996752"/>
           </a:xfrm>
           <a:prstGeom prst="rect">
@@ -2487,7 +2489,7 @@
         </p:blipFill>
         <p:spPr>
           <a:xfrm>
-            <a:off x="5233360" y="1921173"/>
+            <a:off x="661475" y="1921173"/>
             <a:ext cx="6296860" cy="921941"/>
           </a:xfrm>
           <a:prstGeom prst="rect">
@@ -2503,7 +2505,7 @@
         </p:nvSpPr>
         <p:spPr>
           <a:xfrm>
-            <a:off x="5488049" y="2099667"/>
+            <a:off x="916163" y="2099667"/>
             <a:ext cx="5863681" cy="249138"/>
           </a:xfrm>
           <a:prstGeom prst="rect">
@@ -2545,7 +2547,7 @@
         </p:nvSpPr>
         <p:spPr>
           <a:xfrm>
-            <a:off x="5488049" y="2429470"/>
+            <a:off x="916163" y="2429470"/>
             <a:ext cx="5863681" cy="235148"/>
           </a:xfrm>
           <a:prstGeom prst="rect">
@@ -2601,7 +2603,7 @@
         </p:blipFill>
         <p:spPr>
           <a:xfrm>
-            <a:off x="5233360" y="2977654"/>
+            <a:off x="661475" y="2977654"/>
             <a:ext cx="6296860" cy="921941"/>
           </a:xfrm>
           <a:prstGeom prst="rect">
@@ -2617,7 +2619,7 @@
         </p:nvSpPr>
         <p:spPr>
           <a:xfrm>
-            <a:off x="5488049" y="3156148"/>
+            <a:off x="916163" y="3156148"/>
             <a:ext cx="5863681" cy="249138"/>
           </a:xfrm>
           <a:prstGeom prst="rect">
@@ -2659,7 +2661,7 @@
         </p:nvSpPr>
         <p:spPr>
           <a:xfrm>
-            <a:off x="5488049" y="3485952"/>
+            <a:off x="916163" y="3485952"/>
             <a:ext cx="5863681" cy="235148"/>
           </a:xfrm>
           <a:prstGeom prst="rect">
@@ -2715,7 +2717,7 @@
         </p:blipFill>
         <p:spPr>
           <a:xfrm>
-            <a:off x="5233360" y="4034135"/>
+            <a:off x="661475" y="4034135"/>
             <a:ext cx="6296860" cy="921941"/>
           </a:xfrm>
           <a:prstGeom prst="rect">
@@ -2731,7 +2733,7 @@
         </p:nvSpPr>
         <p:spPr>
           <a:xfrm>
-            <a:off x="5488049" y="4212630"/>
+            <a:off x="916163" y="4212630"/>
             <a:ext cx="5863681" cy="249138"/>
           </a:xfrm>
           <a:prstGeom prst="rect">
@@ -2773,7 +2775,7 @@
         </p:nvSpPr>
         <p:spPr>
           <a:xfrm>
-            <a:off x="5488049" y="4542433"/>
+            <a:off x="916163" y="4542433"/>
             <a:ext cx="5863681" cy="235148"/>
           </a:xfrm>
           <a:prstGeom prst="rect">
@@ -2829,7 +2831,7 @@
         </p:blipFill>
         <p:spPr>
           <a:xfrm>
-            <a:off x="5233360" y="5090616"/>
+            <a:off x="661475" y="5090616"/>
             <a:ext cx="6296860" cy="921941"/>
           </a:xfrm>
           <a:prstGeom prst="rect">
@@ -2845,7 +2847,7 @@
         </p:nvSpPr>
         <p:spPr>
           <a:xfrm>
-            <a:off x="5488049" y="5269111"/>
+            <a:off x="916163" y="5269111"/>
             <a:ext cx="5863681" cy="249138"/>
           </a:xfrm>
           <a:prstGeom prst="rect">
@@ -2887,7 +2889,7 @@
         </p:nvSpPr>
         <p:spPr>
           <a:xfrm>
-            <a:off x="5488049" y="5598914"/>
+            <a:off x="916163" y="5598914"/>
             <a:ext cx="5863681" cy="235148"/>
           </a:xfrm>
           <a:prstGeom prst="rect">
@@ -2929,7 +2931,7 @@
         </p:nvSpPr>
         <p:spPr>
           <a:xfrm>
-            <a:off x="4704141" y="6457255"/>
+            <a:off x="132255" y="6457255"/>
             <a:ext cx="3640642" cy="158750"/>
           </a:xfrm>
           <a:prstGeom prst="rect">
@@ -2988,51 +2990,9 @@
           <a:chExt cx="0" cy="0"/>
         </a:xfrm>
       </p:grpSpPr>
-      <p:sp>
-        <p:nvSpPr>
-          <p:cNvPr id="2" name="Text 0"/>
-          <p:cNvSpPr/>
-          <p:nvPr/>
-        </p:nvSpPr>
-        <p:spPr>
-          <a:xfrm>
-            <a:off x="661475" y="544711"/>
-            <a:ext cx="10868745" cy="590649"/>
-          </a:xfrm>
-          <a:prstGeom prst="rect">
-            <a:avLst/>
-          </a:prstGeom>
-          <a:noFill/>
-          <a:ln/>
-        </p:spPr>
-        <p:txBody>
-          <a:bodyPr wrap="none" lIns="0" tIns="0" rIns="0" bIns="0" rtlCol="0" anchor="t"/>
-          <a:lstStyle/>
-          <a:p>
-            <a:pPr algn="l" indent="0" marL="0">
-              <a:lnSpc>
-                <a:spcPct val="104000"/>
-              </a:lnSpc>
-              <a:buNone/>
-            </a:pPr>
-            <a:r>
-              <a:rPr lang="en-US" sz="3700" b="1" dirty="0">
-                <a:solidFill>
-                  <a:srgbClr val="111111"/>
-                </a:solidFill>
-                <a:latin typeface="Orbitron Bold" pitchFamily="34" charset="0"/>
-                <a:ea typeface="Orbitron Bold" pitchFamily="34" charset="-122"/>
-                <a:cs typeface="Orbitron Bold" pitchFamily="34" charset="-120"/>
-              </a:rPr>
-              <a:t>A CSV is text with rules</a:t>
-            </a:r>
-            <a:endParaRPr lang="en-US" sz="3700" dirty="0"/>
-          </a:p>
-        </p:txBody>
-      </p:sp>
       <p:pic>
         <p:nvPicPr>
-          <p:cNvPr id="3" name="Image 0" descr="preencoded.png">    </p:cNvPr>
+          <p:cNvPr id="2" name="Image 0" descr="preencoded.png">    </p:cNvPr>
           <p:cNvPicPr>
             <a:picLocks noChangeAspect="1"/>
           </p:cNvPicPr>
@@ -3046,8 +3006,8 @@
         </p:blipFill>
         <p:spPr>
           <a:xfrm>
-            <a:off x="661475" y="1848644"/>
-            <a:ext cx="6903269" cy="3911898"/>
+            <a:off x="7619809" y="0"/>
+            <a:ext cx="4571886" cy="6858000"/>
           </a:xfrm>
           <a:prstGeom prst="rect">
             <a:avLst/>
@@ -3056,13 +3016,57 @@
       </p:pic>
       <p:sp>
         <p:nvSpPr>
+          <p:cNvPr id="3" name="Text 0"/>
+          <p:cNvSpPr/>
+          <p:nvPr/>
+        </p:nvSpPr>
+        <p:spPr>
+          <a:xfrm>
+            <a:off x="661475" y="1102519"/>
+            <a:ext cx="6296860" cy="1181298"/>
+          </a:xfrm>
+          <a:prstGeom prst="rect">
+            <a:avLst/>
+          </a:prstGeom>
+          <a:noFill/>
+          <a:ln/>
+        </p:spPr>
+        <p:txBody>
+          <a:bodyPr wrap="square" lIns="0" tIns="0" rIns="0" bIns="0" rtlCol="0" anchor="t">
+            <a:normAutofit/>
+          </a:bodyPr>
+          <a:lstStyle/>
+          <a:p>
+            <a:pPr algn="l" indent="0" marL="0">
+              <a:lnSpc>
+                <a:spcPct val="104000"/>
+              </a:lnSpc>
+              <a:buNone/>
+            </a:pPr>
+            <a:r>
+              <a:rPr lang="en-US" sz="3700" b="1" dirty="0">
+                <a:solidFill>
+                  <a:srgbClr val="111111"/>
+                </a:solidFill>
+                <a:latin typeface="Orbitron Bold" pitchFamily="34" charset="0"/>
+                <a:ea typeface="Orbitron Bold" pitchFamily="34" charset="-122"/>
+                <a:cs typeface="Orbitron Bold" pitchFamily="34" charset="-120"/>
+              </a:rPr>
+              <a:t>A CSV is text with rules</a:t>
+            </a:r>
+            <a:endParaRPr lang="en-US" sz="3700" dirty="0"/>
+          </a:p>
+        </p:txBody>
+      </p:sp>
+      <p:sp>
+        <p:nvSpPr>
           <p:cNvPr id="4" name="Shape 1"/>
           <p:cNvSpPr/>
           <p:nvPr/>
         </p:nvSpPr>
         <p:spPr>
           <a:xfrm>
-            <a:off x="8032251" y="1631454"/>
+            <a:off x="661475" y="2567285"/>
             <a:ext cx="425241" cy="425252"/>
           </a:xfrm>
           <a:prstGeom prst="roundRect">
@@ -3089,7 +3093,7 @@
         </p:nvSpPr>
         <p:spPr>
           <a:xfrm>
-            <a:off x="8103141" y="1666875"/>
+            <a:off x="732365" y="2602706"/>
             <a:ext cx="283461" cy="354409"/>
           </a:xfrm>
           <a:prstGeom prst="rect">
@@ -3131,19 +3135,17 @@
         </p:nvSpPr>
         <p:spPr>
           <a:xfrm>
-            <a:off x="8646499" y="1696343"/>
-            <a:ext cx="2889971" cy="885825"/>
-          </a:xfrm>
-          <a:prstGeom prst="rect">
-            <a:avLst/>
-          </a:prstGeom>
-          <a:noFill/>
-          <a:ln/>
-        </p:spPr>
-        <p:txBody>
-          <a:bodyPr wrap="square" lIns="0" tIns="0" rIns="0" bIns="0" rtlCol="0" anchor="t">
-            <a:normAutofit/>
-          </a:bodyPr>
+            <a:off x="1275723" y="2632174"/>
+            <a:ext cx="5682612" cy="295275"/>
+          </a:xfrm>
+          <a:prstGeom prst="rect">
+            <a:avLst/>
+          </a:prstGeom>
+          <a:noFill/>
+          <a:ln/>
+        </p:spPr>
+        <p:txBody>
+          <a:bodyPr wrap="none" lIns="0" tIns="0" rIns="0" bIns="0" rtlCol="0" anchor="t"/>
           <a:lstStyle/>
           <a:p>
             <a:pPr algn="l" indent="0" marL="0">
@@ -3175,7 +3177,7 @@
         </p:nvSpPr>
         <p:spPr>
           <a:xfrm>
-            <a:off x="8032251" y="2960191"/>
+            <a:off x="661475" y="3370560"/>
             <a:ext cx="425241" cy="425252"/>
           </a:xfrm>
           <a:prstGeom prst="roundRect">
@@ -3202,7 +3204,7 @@
         </p:nvSpPr>
         <p:spPr>
           <a:xfrm>
-            <a:off x="8103141" y="2995613"/>
+            <a:off x="732365" y="3405981"/>
             <a:ext cx="283461" cy="354409"/>
           </a:xfrm>
           <a:prstGeom prst="rect">
@@ -3244,19 +3246,17 @@
         </p:nvSpPr>
         <p:spPr>
           <a:xfrm>
-            <a:off x="8646499" y="3025080"/>
-            <a:ext cx="2889971" cy="590550"/>
-          </a:xfrm>
-          <a:prstGeom prst="rect">
-            <a:avLst/>
-          </a:prstGeom>
-          <a:noFill/>
-          <a:ln/>
-        </p:spPr>
-        <p:txBody>
-          <a:bodyPr wrap="square" lIns="0" tIns="0" rIns="0" bIns="0" rtlCol="0" anchor="t">
-            <a:normAutofit/>
-          </a:bodyPr>
+            <a:off x="1275723" y="3435449"/>
+            <a:ext cx="5682612" cy="295275"/>
+          </a:xfrm>
+          <a:prstGeom prst="rect">
+            <a:avLst/>
+          </a:prstGeom>
+          <a:noFill/>
+          <a:ln/>
+        </p:spPr>
+        <p:txBody>
+          <a:bodyPr wrap="none" lIns="0" tIns="0" rIns="0" bIns="0" rtlCol="0" anchor="t"/>
           <a:lstStyle/>
           <a:p>
             <a:pPr algn="l" indent="0" marL="0">
@@ -3288,7 +3288,7 @@
         </p:nvSpPr>
         <p:spPr>
           <a:xfrm>
-            <a:off x="8032251" y="3993654"/>
+            <a:off x="661475" y="4173835"/>
             <a:ext cx="425241" cy="425252"/>
           </a:xfrm>
           <a:prstGeom prst="roundRect">
@@ -3315,7 +3315,7 @@
         </p:nvSpPr>
         <p:spPr>
           <a:xfrm>
-            <a:off x="8103141" y="4029075"/>
+            <a:off x="732365" y="4209256"/>
             <a:ext cx="283461" cy="354409"/>
           </a:xfrm>
           <a:prstGeom prst="rect">
@@ -3357,8 +3357,8 @@
         </p:nvSpPr>
         <p:spPr>
           <a:xfrm>
-            <a:off x="8646499" y="4058543"/>
-            <a:ext cx="2889971" cy="885825"/>
+            <a:off x="1275723" y="4238724"/>
+            <a:ext cx="5682612" cy="590550"/>
           </a:xfrm>
           <a:prstGeom prst="rect">
             <a:avLst/>
@@ -3401,7 +3401,7 @@
         </p:nvSpPr>
         <p:spPr>
           <a:xfrm>
-            <a:off x="8032251" y="5322391"/>
+            <a:off x="661475" y="5207298"/>
             <a:ext cx="425241" cy="425252"/>
           </a:xfrm>
           <a:prstGeom prst="roundRect">
@@ -3428,7 +3428,7 @@
         </p:nvSpPr>
         <p:spPr>
           <a:xfrm>
-            <a:off x="8103141" y="5357813"/>
+            <a:off x="732365" y="5242719"/>
             <a:ext cx="283461" cy="354409"/>
           </a:xfrm>
           <a:prstGeom prst="rect">
@@ -3470,19 +3470,17 @@
         </p:nvSpPr>
         <p:spPr>
           <a:xfrm>
-            <a:off x="8646499" y="5387280"/>
-            <a:ext cx="2889971" cy="590550"/>
-          </a:xfrm>
-          <a:prstGeom prst="rect">
-            <a:avLst/>
-          </a:prstGeom>
-          <a:noFill/>
-          <a:ln/>
-        </p:spPr>
-        <p:txBody>
-          <a:bodyPr wrap="square" lIns="0" tIns="0" rIns="0" bIns="0" rtlCol="0" anchor="t">
-            <a:normAutofit/>
-          </a:bodyPr>
+            <a:off x="1275723" y="5272187"/>
+            <a:ext cx="5682612" cy="295275"/>
+          </a:xfrm>
+          <a:prstGeom prst="rect">
+            <a:avLst/>
+          </a:prstGeom>
+          <a:noFill/>
+          <a:ln/>
+        </p:spPr>
+        <p:txBody>
+          <a:bodyPr wrap="none" lIns="0" tIns="0" rIns="0" bIns="0" rtlCol="0" anchor="t"/>
           <a:lstStyle/>
           <a:p>
             <a:pPr algn="l" indent="0" marL="0">
@@ -4335,40 +4333,16 @@
           <a:chExt cx="0" cy="0"/>
         </a:xfrm>
       </p:grpSpPr>
-      <p:pic>
-        <p:nvPicPr>
-          <p:cNvPr id="2" name="Image 0" descr="preencoded.png">    </p:cNvPr>
-          <p:cNvPicPr>
-            <a:picLocks noChangeAspect="1"/>
-          </p:cNvPicPr>
-          <p:nvPr/>
-        </p:nvPicPr>
-        <p:blipFill>
-          <a:blip r:embed="rId1"/>
-          <a:stretch>
-            <a:fillRect/>
-          </a:stretch>
-        </p:blipFill>
-        <p:spPr>
-          <a:xfrm>
-            <a:off x="0" y="0"/>
-            <a:ext cx="4571886" cy="6858000"/>
-          </a:xfrm>
-          <a:prstGeom prst="rect">
-            <a:avLst/>
-          </a:prstGeom>
-        </p:spPr>
-      </p:pic>
-      <p:sp>
-        <p:nvSpPr>
-          <p:cNvPr id="3" name="Text 0"/>
-          <p:cNvSpPr/>
-          <p:nvPr/>
-        </p:nvSpPr>
-        <p:spPr>
-          <a:xfrm>
-            <a:off x="5233360" y="638770"/>
-            <a:ext cx="6296860" cy="1771948"/>
+      <p:sp>
+        <p:nvSpPr>
+          <p:cNvPr id="2" name="Text 0"/>
+          <p:cNvSpPr/>
+          <p:nvPr/>
+        </p:nvSpPr>
+        <p:spPr>
+          <a:xfrm>
+            <a:off x="661475" y="1038027"/>
+            <a:ext cx="10868745" cy="1181298"/>
           </a:xfrm>
           <a:prstGeom prst="rect">
             <a:avLst/>
@@ -4405,18 +4379,18 @@
       </p:sp>
       <p:sp>
         <p:nvSpPr>
-          <p:cNvPr id="4" name="Shape 1"/>
-          <p:cNvSpPr/>
-          <p:nvPr/>
-        </p:nvSpPr>
-        <p:spPr>
-          <a:xfrm>
-            <a:off x="5233360" y="2694186"/>
-            <a:ext cx="6296860" cy="3402211"/>
+          <p:cNvPr id="3" name="Shape 1"/>
+          <p:cNvSpPr/>
+          <p:nvPr/>
+        </p:nvSpPr>
+        <p:spPr>
+          <a:xfrm>
+            <a:off x="661475" y="2597348"/>
+            <a:ext cx="10868745" cy="3099792"/>
           </a:xfrm>
           <a:prstGeom prst="roundRect">
             <a:avLst>
-              <a:gd name="adj" fmla="val 2333"/>
+              <a:gd name="adj" fmla="val 2561"/>
             </a:avLst>
           </a:prstGeom>
           <a:solidFill>
@@ -4427,14 +4401,14 @@
       </p:sp>
       <p:sp>
         <p:nvSpPr>
-          <p:cNvPr id="5" name="Text 2"/>
-          <p:cNvSpPr/>
-          <p:nvPr/>
-        </p:nvSpPr>
-        <p:spPr>
-          <a:xfrm>
-            <a:off x="5460169" y="2883198"/>
-            <a:ext cx="5843243" cy="3024188"/>
+          <p:cNvPr id="4" name="Text 2"/>
+          <p:cNvSpPr/>
+          <p:nvPr/>
+        </p:nvSpPr>
+        <p:spPr>
+          <a:xfrm>
+            <a:off x="888283" y="2786360"/>
+            <a:ext cx="10415129" cy="2721769"/>
           </a:xfrm>
           <a:prstGeom prst="rect">
             <a:avLst/>
@@ -4620,13 +4594,13 @@
       </p:sp>
       <p:sp>
         <p:nvSpPr>
-          <p:cNvPr id="6" name="Text 3"/>
-          <p:cNvSpPr/>
-          <p:nvPr/>
-        </p:nvSpPr>
-        <p:spPr>
-          <a:xfrm>
-            <a:off x="4704141" y="6457255"/>
+          <p:cNvPr id="5" name="Text 3"/>
+          <p:cNvSpPr/>
+          <p:nvPr/>
+        </p:nvSpPr>
+        <p:spPr>
+          <a:xfrm>
+            <a:off x="132255" y="6457255"/>
             <a:ext cx="3640642" cy="158750"/>
           </a:xfrm>
           <a:prstGeom prst="rect">
@@ -4931,7 +4905,7 @@
                 <a:ea typeface="Orbitron Bold" pitchFamily="34" charset="-122"/>
                 <a:cs typeface="Orbitron Bold" pitchFamily="34" charset="-120"/>
               </a:rPr>
-              <a:t>Convert to JSON</a:t>
+              <a:t>Write JSON</a:t>
             </a:r>
             <a:endParaRPr lang="en-US" sz="1850" dirty="0"/>
           </a:p>
@@ -5549,7 +5523,7 @@
         </p:nvSpPr>
         <p:spPr>
           <a:xfrm>
-            <a:off x="5233360" y="688181"/>
+            <a:off x="5233360" y="642938"/>
             <a:ext cx="6296860" cy="544513"/>
           </a:xfrm>
           <a:prstGeom prst="rect">
@@ -5583,62 +5557,65 @@
           </a:p>
         </p:txBody>
       </p:sp>
-      <p:sp>
-        <p:nvSpPr>
-          <p:cNvPr id="4" name="Shape 1"/>
-          <p:cNvSpPr/>
-          <p:nvPr/>
-        </p:nvSpPr>
-        <p:spPr>
-          <a:xfrm>
-            <a:off x="5233360" y="1473597"/>
-            <a:ext cx="6296860" cy="1022846"/>
-          </a:xfrm>
-          <a:prstGeom prst="roundRect">
-            <a:avLst>
-              <a:gd name="adj" fmla="val 7155"/>
-            </a:avLst>
-          </a:prstGeom>
-          <a:solidFill>
-            <a:srgbClr val="D1E5FA"/>
-          </a:solidFill>
-          <a:ln w="19050">
-            <a:solidFill>
-              <a:srgbClr val="B7CBE0"/>
-            </a:solidFill>
-            <a:prstDash val="solid"/>
-          </a:ln>
-        </p:spPr>
-      </p:sp>
-      <p:sp>
-        <p:nvSpPr>
-          <p:cNvPr id="5" name="Text 2"/>
-          <p:cNvSpPr/>
-          <p:nvPr/>
-        </p:nvSpPr>
-        <p:spPr>
-          <a:xfrm>
-            <a:off x="5426634" y="1666875"/>
-            <a:ext cx="5910313" cy="272157"/>
-          </a:xfrm>
-          <a:prstGeom prst="rect">
-            <a:avLst/>
-          </a:prstGeom>
-          <a:noFill/>
-          <a:ln/>
-        </p:spPr>
-        <p:txBody>
-          <a:bodyPr wrap="none" lIns="0" tIns="0" rIns="0" bIns="0" rtlCol="0" anchor="t"/>
-          <a:lstStyle/>
-          <a:p>
-            <a:pPr algn="l" indent="0" marL="0">
-              <a:lnSpc>
-                <a:spcPct val="104000"/>
-              </a:lnSpc>
-              <a:buNone/>
-            </a:pPr>
-            <a:r>
-              <a:rPr lang="en-US" sz="1700" b="1" dirty="0">
+      <p:pic>
+        <p:nvPicPr>
+          <p:cNvPr id="4" name="Image 1" descr="preencoded.png">    </p:cNvPr>
+          <p:cNvPicPr>
+            <a:picLocks noChangeAspect="1"/>
+          </p:cNvPicPr>
+          <p:nvPr/>
+        </p:nvPicPr>
+        <p:blipFill>
+          <a:blip r:embed="rId2">
+            <a:extLst>
+              <a:ext uri="{96DAC541-7B7A-43D3-8B79-37D633B846F1}">
+                <asvg:svgBlip xmlns:asvg="http://schemas.microsoft.com/office/drawing/2016/SVG/main" r:embed="rId3"/>
+              </a:ext>
+            </a:extLst>
+          </a:blip>
+          <a:stretch>
+            <a:fillRect/>
+          </a:stretch>
+        </p:blipFill>
+        <p:spPr>
+          <a:xfrm>
+            <a:off x="5233360" y="1428353"/>
+            <a:ext cx="6296860" cy="1045468"/>
+          </a:xfrm>
+          <a:prstGeom prst="rect">
+            <a:avLst/>
+          </a:prstGeom>
+        </p:spPr>
+      </p:pic>
+      <p:sp>
+        <p:nvSpPr>
+          <p:cNvPr id="5" name="Text 1"/>
+          <p:cNvSpPr/>
+          <p:nvPr/>
+        </p:nvSpPr>
+        <p:spPr>
+          <a:xfrm>
+            <a:off x="5460665" y="1787723"/>
+            <a:ext cx="261336" cy="326727"/>
+          </a:xfrm>
+          <a:prstGeom prst="rect">
+            <a:avLst/>
+          </a:prstGeom>
+          <a:noFill/>
+          <a:ln/>
+        </p:spPr>
+        <p:txBody>
+          <a:bodyPr wrap="none" lIns="0" tIns="0" rIns="0" bIns="0" rtlCol="0" anchor="ctr"/>
+          <a:lstStyle/>
+          <a:p>
+            <a:pPr algn="ctr" indent="0" marL="0">
+              <a:lnSpc>
+                <a:spcPct val="100000"/>
+              </a:lnSpc>
+              <a:buNone/>
+            </a:pPr>
+            <a:r>
+              <a:rPr lang="en-US" sz="2050" b="1" dirty="0">
                 <a:solidFill>
                   <a:srgbClr val="1C1C1C"/>
                 </a:solidFill>
@@ -5646,6 +5623,48 @@
                 <a:ea typeface="Orbitron Bold" pitchFamily="34" charset="-122"/>
                 <a:cs typeface="Orbitron Bold" pitchFamily="34" charset="-120"/>
               </a:rPr>
+              <a:t>1</a:t>
+            </a:r>
+            <a:endParaRPr lang="en-US" sz="2050" dirty="0"/>
+          </a:p>
+        </p:txBody>
+      </p:sp>
+      <p:sp>
+        <p:nvSpPr>
+          <p:cNvPr id="6" name="Text 2"/>
+          <p:cNvSpPr/>
+          <p:nvPr/>
+        </p:nvSpPr>
+        <p:spPr>
+          <a:xfrm>
+            <a:off x="6110035" y="1621631"/>
+            <a:ext cx="5226911" cy="272157"/>
+          </a:xfrm>
+          <a:prstGeom prst="rect">
+            <a:avLst/>
+          </a:prstGeom>
+          <a:noFill/>
+          <a:ln/>
+        </p:spPr>
+        <p:txBody>
+          <a:bodyPr wrap="none" lIns="0" tIns="0" rIns="0" bIns="0" rtlCol="0" anchor="t"/>
+          <a:lstStyle/>
+          <a:p>
+            <a:pPr algn="l" indent="0" marL="0">
+              <a:lnSpc>
+                <a:spcPct val="104000"/>
+              </a:lnSpc>
+              <a:buNone/>
+            </a:pPr>
+            <a:r>
+              <a:rPr lang="en-US" sz="1700" b="1" dirty="0">
+                <a:solidFill>
+                  <a:srgbClr val="1C1C1C"/>
+                </a:solidFill>
+                <a:latin typeface="Orbitron Bold" pitchFamily="34" charset="0"/>
+                <a:ea typeface="Orbitron Bold" pitchFamily="34" charset="-122"/>
+                <a:cs typeface="Orbitron Bold" pitchFamily="34" charset="-120"/>
+              </a:rPr>
               <a:t>Blank rows and a pasted header</a:t>
             </a:r>
             <a:endParaRPr lang="en-US" sz="1700" dirty="0"/>
@@ -5654,14 +5673,14 @@
       </p:sp>
       <p:sp>
         <p:nvSpPr>
-          <p:cNvPr id="6" name="Text 3"/>
-          <p:cNvSpPr/>
-          <p:nvPr/>
-        </p:nvSpPr>
-        <p:spPr>
-          <a:xfrm>
-            <a:off x="5426634" y="2035373"/>
-            <a:ext cx="5910313" cy="267791"/>
+          <p:cNvPr id="7" name="Text 3"/>
+          <p:cNvSpPr/>
+          <p:nvPr/>
+        </p:nvSpPr>
+        <p:spPr>
+          <a:xfrm>
+            <a:off x="6110035" y="1990130"/>
+            <a:ext cx="5226911" cy="267791"/>
           </a:xfrm>
           <a:prstGeom prst="rect">
             <a:avLst/>
@@ -5694,62 +5713,65 @@
           </a:p>
         </p:txBody>
       </p:sp>
-      <p:sp>
-        <p:nvSpPr>
-          <p:cNvPr id="7" name="Shape 4"/>
-          <p:cNvSpPr/>
-          <p:nvPr/>
-        </p:nvSpPr>
-        <p:spPr>
-          <a:xfrm>
-            <a:off x="5233360" y="2657078"/>
-            <a:ext cx="6296860" cy="1022846"/>
-          </a:xfrm>
-          <a:prstGeom prst="roundRect">
-            <a:avLst>
-              <a:gd name="adj" fmla="val 7155"/>
-            </a:avLst>
-          </a:prstGeom>
-          <a:solidFill>
-            <a:srgbClr val="D1E5FA"/>
-          </a:solidFill>
-          <a:ln w="19050">
-            <a:solidFill>
-              <a:srgbClr val="B7CBE0"/>
-            </a:solidFill>
-            <a:prstDash val="solid"/>
-          </a:ln>
-        </p:spPr>
-      </p:sp>
-      <p:sp>
-        <p:nvSpPr>
-          <p:cNvPr id="8" name="Text 5"/>
-          <p:cNvSpPr/>
-          <p:nvPr/>
-        </p:nvSpPr>
-        <p:spPr>
-          <a:xfrm>
-            <a:off x="5426634" y="2850356"/>
-            <a:ext cx="5910313" cy="272157"/>
-          </a:xfrm>
-          <a:prstGeom prst="rect">
-            <a:avLst/>
-          </a:prstGeom>
-          <a:noFill/>
-          <a:ln/>
-        </p:spPr>
-        <p:txBody>
-          <a:bodyPr wrap="none" lIns="0" tIns="0" rIns="0" bIns="0" rtlCol="0" anchor="t"/>
-          <a:lstStyle/>
-          <a:p>
-            <a:pPr algn="l" indent="0" marL="0">
-              <a:lnSpc>
-                <a:spcPct val="104000"/>
-              </a:lnSpc>
-              <a:buNone/>
-            </a:pPr>
-            <a:r>
-              <a:rPr lang="en-US" sz="1700" b="1" dirty="0">
+      <p:pic>
+        <p:nvPicPr>
+          <p:cNvPr id="8" name="Image 2" descr="preencoded.png">    </p:cNvPr>
+          <p:cNvPicPr>
+            <a:picLocks noChangeAspect="1"/>
+          </p:cNvPicPr>
+          <p:nvPr/>
+        </p:nvPicPr>
+        <p:blipFill>
+          <a:blip r:embed="rId4">
+            <a:extLst>
+              <a:ext uri="{96DAC541-7B7A-43D3-8B79-37D633B846F1}">
+                <asvg:svgBlip xmlns:asvg="http://schemas.microsoft.com/office/drawing/2016/SVG/main" r:embed="rId5"/>
+              </a:ext>
+            </a:extLst>
+          </a:blip>
+          <a:stretch>
+            <a:fillRect/>
+          </a:stretch>
+        </p:blipFill>
+        <p:spPr>
+          <a:xfrm>
+            <a:off x="5233360" y="2634456"/>
+            <a:ext cx="6296860" cy="1045468"/>
+          </a:xfrm>
+          <a:prstGeom prst="rect">
+            <a:avLst/>
+          </a:prstGeom>
+        </p:spPr>
+      </p:pic>
+      <p:sp>
+        <p:nvSpPr>
+          <p:cNvPr id="9" name="Text 4"/>
+          <p:cNvSpPr/>
+          <p:nvPr/>
+        </p:nvSpPr>
+        <p:spPr>
+          <a:xfrm>
+            <a:off x="5460665" y="2993827"/>
+            <a:ext cx="261336" cy="326727"/>
+          </a:xfrm>
+          <a:prstGeom prst="rect">
+            <a:avLst/>
+          </a:prstGeom>
+          <a:noFill/>
+          <a:ln/>
+        </p:spPr>
+        <p:txBody>
+          <a:bodyPr wrap="none" lIns="0" tIns="0" rIns="0" bIns="0" rtlCol="0" anchor="ctr"/>
+          <a:lstStyle/>
+          <a:p>
+            <a:pPr algn="ctr" indent="0" marL="0">
+              <a:lnSpc>
+                <a:spcPct val="100000"/>
+              </a:lnSpc>
+              <a:buNone/>
+            </a:pPr>
+            <a:r>
+              <a:rPr lang="en-US" sz="2050" b="1" dirty="0">
                 <a:solidFill>
                   <a:srgbClr val="1C1C1C"/>
                 </a:solidFill>
@@ -5757,6 +5779,48 @@
                 <a:ea typeface="Orbitron Bold" pitchFamily="34" charset="-122"/>
                 <a:cs typeface="Orbitron Bold" pitchFamily="34" charset="-120"/>
               </a:rPr>
+              <a:t>2</a:t>
+            </a:r>
+            <a:endParaRPr lang="en-US" sz="2050" dirty="0"/>
+          </a:p>
+        </p:txBody>
+      </p:sp>
+      <p:sp>
+        <p:nvSpPr>
+          <p:cNvPr id="10" name="Text 5"/>
+          <p:cNvSpPr/>
+          <p:nvPr/>
+        </p:nvSpPr>
+        <p:spPr>
+          <a:xfrm>
+            <a:off x="6110035" y="2827734"/>
+            <a:ext cx="5226911" cy="272157"/>
+          </a:xfrm>
+          <a:prstGeom prst="rect">
+            <a:avLst/>
+          </a:prstGeom>
+          <a:noFill/>
+          <a:ln/>
+        </p:spPr>
+        <p:txBody>
+          <a:bodyPr wrap="none" lIns="0" tIns="0" rIns="0" bIns="0" rtlCol="0" anchor="t"/>
+          <a:lstStyle/>
+          <a:p>
+            <a:pPr algn="l" indent="0" marL="0">
+              <a:lnSpc>
+                <a:spcPct val="104000"/>
+              </a:lnSpc>
+              <a:buNone/>
+            </a:pPr>
+            <a:r>
+              <a:rPr lang="en-US" sz="1700" b="1" dirty="0">
+                <a:solidFill>
+                  <a:srgbClr val="1C1C1C"/>
+                </a:solidFill>
+                <a:latin typeface="Orbitron Bold" pitchFamily="34" charset="0"/>
+                <a:ea typeface="Orbitron Bold" pitchFamily="34" charset="-122"/>
+                <a:cs typeface="Orbitron Bold" pitchFamily="34" charset="-120"/>
+              </a:rPr>
               <a:t>Unreadable values</a:t>
             </a:r>
             <a:endParaRPr lang="en-US" sz="1700" dirty="0"/>
@@ -5765,14 +5829,14 @@
       </p:sp>
       <p:sp>
         <p:nvSpPr>
-          <p:cNvPr id="9" name="Text 6"/>
-          <p:cNvSpPr/>
-          <p:nvPr/>
-        </p:nvSpPr>
-        <p:spPr>
-          <a:xfrm>
-            <a:off x="5426634" y="3218855"/>
-            <a:ext cx="5910313" cy="267791"/>
+          <p:cNvPr id="11" name="Text 6"/>
+          <p:cNvSpPr/>
+          <p:nvPr/>
+        </p:nvSpPr>
+        <p:spPr>
+          <a:xfrm>
+            <a:off x="6110035" y="3196233"/>
+            <a:ext cx="5226911" cy="267791"/>
           </a:xfrm>
           <a:prstGeom prst="rect">
             <a:avLst/>
@@ -5805,62 +5869,65 @@
           </a:p>
         </p:txBody>
       </p:sp>
-      <p:sp>
-        <p:nvSpPr>
-          <p:cNvPr id="10" name="Shape 7"/>
-          <p:cNvSpPr/>
-          <p:nvPr/>
-        </p:nvSpPr>
+      <p:pic>
+        <p:nvPicPr>
+          <p:cNvPr id="12" name="Image 3" descr="preencoded.png">    </p:cNvPr>
+          <p:cNvPicPr>
+            <a:picLocks noChangeAspect="1"/>
+          </p:cNvPicPr>
+          <p:nvPr/>
+        </p:nvPicPr>
+        <p:blipFill>
+          <a:blip r:embed="rId6">
+            <a:extLst>
+              <a:ext uri="{96DAC541-7B7A-43D3-8B79-37D633B846F1}">
+                <asvg:svgBlip xmlns:asvg="http://schemas.microsoft.com/office/drawing/2016/SVG/main" r:embed="rId7"/>
+              </a:ext>
+            </a:extLst>
+          </a:blip>
+          <a:stretch>
+            <a:fillRect/>
+          </a:stretch>
+        </p:blipFill>
         <p:spPr>
           <a:xfrm>
             <a:off x="5233360" y="3840559"/>
-            <a:ext cx="6296860" cy="1022846"/>
-          </a:xfrm>
-          <a:prstGeom prst="roundRect">
-            <a:avLst>
-              <a:gd name="adj" fmla="val 7155"/>
-            </a:avLst>
-          </a:prstGeom>
-          <a:solidFill>
-            <a:srgbClr val="D1E5FA"/>
-          </a:solidFill>
-          <a:ln w="19050">
-            <a:solidFill>
-              <a:srgbClr val="B7CBE0"/>
-            </a:solidFill>
-            <a:prstDash val="solid"/>
-          </a:ln>
-        </p:spPr>
-      </p:sp>
-      <p:sp>
-        <p:nvSpPr>
-          <p:cNvPr id="11" name="Text 8"/>
-          <p:cNvSpPr/>
-          <p:nvPr/>
-        </p:nvSpPr>
-        <p:spPr>
-          <a:xfrm>
-            <a:off x="5426634" y="4033838"/>
-            <a:ext cx="5910313" cy="272157"/>
-          </a:xfrm>
-          <a:prstGeom prst="rect">
-            <a:avLst/>
-          </a:prstGeom>
-          <a:noFill/>
-          <a:ln/>
-        </p:spPr>
-        <p:txBody>
-          <a:bodyPr wrap="none" lIns="0" tIns="0" rIns="0" bIns="0" rtlCol="0" anchor="t"/>
-          <a:lstStyle/>
-          <a:p>
-            <a:pPr algn="l" indent="0" marL="0">
-              <a:lnSpc>
-                <a:spcPct val="104000"/>
-              </a:lnSpc>
-              <a:buNone/>
-            </a:pPr>
-            <a:r>
-              <a:rPr lang="en-US" sz="1700" b="1" dirty="0">
+            <a:ext cx="6296860" cy="1045468"/>
+          </a:xfrm>
+          <a:prstGeom prst="rect">
+            <a:avLst/>
+          </a:prstGeom>
+        </p:spPr>
+      </p:pic>
+      <p:sp>
+        <p:nvSpPr>
+          <p:cNvPr id="13" name="Text 7"/>
+          <p:cNvSpPr/>
+          <p:nvPr/>
+        </p:nvSpPr>
+        <p:spPr>
+          <a:xfrm>
+            <a:off x="5460665" y="4199930"/>
+            <a:ext cx="261336" cy="326727"/>
+          </a:xfrm>
+          <a:prstGeom prst="rect">
+            <a:avLst/>
+          </a:prstGeom>
+          <a:noFill/>
+          <a:ln/>
+        </p:spPr>
+        <p:txBody>
+          <a:bodyPr wrap="none" lIns="0" tIns="0" rIns="0" bIns="0" rtlCol="0" anchor="ctr"/>
+          <a:lstStyle/>
+          <a:p>
+            <a:pPr algn="ctr" indent="0" marL="0">
+              <a:lnSpc>
+                <a:spcPct val="100000"/>
+              </a:lnSpc>
+              <a:buNone/>
+            </a:pPr>
+            <a:r>
+              <a:rPr lang="en-US" sz="2050" b="1" dirty="0">
                 <a:solidFill>
                   <a:srgbClr val="1C1C1C"/>
                 </a:solidFill>
@@ -5868,6 +5935,48 @@
                 <a:ea typeface="Orbitron Bold" pitchFamily="34" charset="-122"/>
                 <a:cs typeface="Orbitron Bold" pitchFamily="34" charset="-120"/>
               </a:rPr>
+              <a:t>3</a:t>
+            </a:r>
+            <a:endParaRPr lang="en-US" sz="2050" dirty="0"/>
+          </a:p>
+        </p:txBody>
+      </p:sp>
+      <p:sp>
+        <p:nvSpPr>
+          <p:cNvPr id="14" name="Text 8"/>
+          <p:cNvSpPr/>
+          <p:nvPr/>
+        </p:nvSpPr>
+        <p:spPr>
+          <a:xfrm>
+            <a:off x="6110035" y="4033838"/>
+            <a:ext cx="5226911" cy="272157"/>
+          </a:xfrm>
+          <a:prstGeom prst="rect">
+            <a:avLst/>
+          </a:prstGeom>
+          <a:noFill/>
+          <a:ln/>
+        </p:spPr>
+        <p:txBody>
+          <a:bodyPr wrap="none" lIns="0" tIns="0" rIns="0" bIns="0" rtlCol="0" anchor="t"/>
+          <a:lstStyle/>
+          <a:p>
+            <a:pPr algn="l" indent="0" marL="0">
+              <a:lnSpc>
+                <a:spcPct val="104000"/>
+              </a:lnSpc>
+              <a:buNone/>
+            </a:pPr>
+            <a:r>
+              <a:rPr lang="en-US" sz="1700" b="1" dirty="0">
+                <a:solidFill>
+                  <a:srgbClr val="1C1C1C"/>
+                </a:solidFill>
+                <a:latin typeface="Orbitron Bold" pitchFamily="34" charset="0"/>
+                <a:ea typeface="Orbitron Bold" pitchFamily="34" charset="-122"/>
+                <a:cs typeface="Orbitron Bold" pitchFamily="34" charset="-120"/>
+              </a:rPr>
               <a:t>Duplicates</a:t>
             </a:r>
             <a:endParaRPr lang="en-US" sz="1700" dirty="0"/>
@@ -5876,14 +5985,14 @@
       </p:sp>
       <p:sp>
         <p:nvSpPr>
-          <p:cNvPr id="12" name="Text 9"/>
-          <p:cNvSpPr/>
-          <p:nvPr/>
-        </p:nvSpPr>
-        <p:spPr>
-          <a:xfrm>
-            <a:off x="5426634" y="4402336"/>
-            <a:ext cx="5910313" cy="267791"/>
+          <p:cNvPr id="15" name="Text 9"/>
+          <p:cNvSpPr/>
+          <p:nvPr/>
+        </p:nvSpPr>
+        <p:spPr>
+          <a:xfrm>
+            <a:off x="6110035" y="4402336"/>
+            <a:ext cx="5226911" cy="267791"/>
           </a:xfrm>
           <a:prstGeom prst="rect">
             <a:avLst/>
@@ -5916,62 +6025,65 @@
           </a:p>
         </p:txBody>
       </p:sp>
-      <p:sp>
-        <p:nvSpPr>
-          <p:cNvPr id="13" name="Shape 10"/>
-          <p:cNvSpPr/>
-          <p:nvPr/>
-        </p:nvSpPr>
-        <p:spPr>
-          <a:xfrm>
-            <a:off x="5233360" y="5024041"/>
-            <a:ext cx="6296860" cy="1022846"/>
-          </a:xfrm>
-          <a:prstGeom prst="roundRect">
-            <a:avLst>
-              <a:gd name="adj" fmla="val 7155"/>
-            </a:avLst>
-          </a:prstGeom>
-          <a:solidFill>
-            <a:srgbClr val="D1E5FA"/>
-          </a:solidFill>
-          <a:ln w="19050">
-            <a:solidFill>
-              <a:srgbClr val="B7CBE0"/>
-            </a:solidFill>
-            <a:prstDash val="solid"/>
-          </a:ln>
-        </p:spPr>
-      </p:sp>
-      <p:sp>
-        <p:nvSpPr>
-          <p:cNvPr id="14" name="Text 11"/>
-          <p:cNvSpPr/>
-          <p:nvPr/>
-        </p:nvSpPr>
-        <p:spPr>
-          <a:xfrm>
-            <a:off x="5426634" y="5217319"/>
-            <a:ext cx="5910313" cy="272157"/>
-          </a:xfrm>
-          <a:prstGeom prst="rect">
-            <a:avLst/>
-          </a:prstGeom>
-          <a:noFill/>
-          <a:ln/>
-        </p:spPr>
-        <p:txBody>
-          <a:bodyPr wrap="none" lIns="0" tIns="0" rIns="0" bIns="0" rtlCol="0" anchor="t"/>
-          <a:lstStyle/>
-          <a:p>
-            <a:pPr algn="l" indent="0" marL="0">
-              <a:lnSpc>
-                <a:spcPct val="104000"/>
-              </a:lnSpc>
-              <a:buNone/>
-            </a:pPr>
-            <a:r>
-              <a:rPr lang="en-US" sz="1700" b="1" dirty="0">
+      <p:pic>
+        <p:nvPicPr>
+          <p:cNvPr id="16" name="Image 4" descr="preencoded.png">    </p:cNvPr>
+          <p:cNvPicPr>
+            <a:picLocks noChangeAspect="1"/>
+          </p:cNvPicPr>
+          <p:nvPr/>
+        </p:nvPicPr>
+        <p:blipFill>
+          <a:blip r:embed="rId8">
+            <a:extLst>
+              <a:ext uri="{96DAC541-7B7A-43D3-8B79-37D633B846F1}">
+                <asvg:svgBlip xmlns:asvg="http://schemas.microsoft.com/office/drawing/2016/SVG/main" r:embed="rId9"/>
+              </a:ext>
+            </a:extLst>
+          </a:blip>
+          <a:stretch>
+            <a:fillRect/>
+          </a:stretch>
+        </p:blipFill>
+        <p:spPr>
+          <a:xfrm>
+            <a:off x="5233360" y="5046663"/>
+            <a:ext cx="6296860" cy="1045468"/>
+          </a:xfrm>
+          <a:prstGeom prst="rect">
+            <a:avLst/>
+          </a:prstGeom>
+        </p:spPr>
+      </p:pic>
+      <p:sp>
+        <p:nvSpPr>
+          <p:cNvPr id="17" name="Text 10"/>
+          <p:cNvSpPr/>
+          <p:nvPr/>
+        </p:nvSpPr>
+        <p:spPr>
+          <a:xfrm>
+            <a:off x="5460665" y="5406033"/>
+            <a:ext cx="261336" cy="326727"/>
+          </a:xfrm>
+          <a:prstGeom prst="rect">
+            <a:avLst/>
+          </a:prstGeom>
+          <a:noFill/>
+          <a:ln/>
+        </p:spPr>
+        <p:txBody>
+          <a:bodyPr wrap="none" lIns="0" tIns="0" rIns="0" bIns="0" rtlCol="0" anchor="ctr"/>
+          <a:lstStyle/>
+          <a:p>
+            <a:pPr algn="ctr" indent="0" marL="0">
+              <a:lnSpc>
+                <a:spcPct val="100000"/>
+              </a:lnSpc>
+              <a:buNone/>
+            </a:pPr>
+            <a:r>
+              <a:rPr lang="en-US" sz="2050" b="1" dirty="0">
                 <a:solidFill>
                   <a:srgbClr val="1C1C1C"/>
                 </a:solidFill>
@@ -5979,6 +6091,48 @@
                 <a:ea typeface="Orbitron Bold" pitchFamily="34" charset="-122"/>
                 <a:cs typeface="Orbitron Bold" pitchFamily="34" charset="-120"/>
               </a:rPr>
+              <a:t>4</a:t>
+            </a:r>
+            <a:endParaRPr lang="en-US" sz="2050" dirty="0"/>
+          </a:p>
+        </p:txBody>
+      </p:sp>
+      <p:sp>
+        <p:nvSpPr>
+          <p:cNvPr id="18" name="Text 11"/>
+          <p:cNvSpPr/>
+          <p:nvPr/>
+        </p:nvSpPr>
+        <p:spPr>
+          <a:xfrm>
+            <a:off x="6110035" y="5239941"/>
+            <a:ext cx="5226911" cy="272157"/>
+          </a:xfrm>
+          <a:prstGeom prst="rect">
+            <a:avLst/>
+          </a:prstGeom>
+          <a:noFill/>
+          <a:ln/>
+        </p:spPr>
+        <p:txBody>
+          <a:bodyPr wrap="none" lIns="0" tIns="0" rIns="0" bIns="0" rtlCol="0" anchor="t"/>
+          <a:lstStyle/>
+          <a:p>
+            <a:pPr algn="l" indent="0" marL="0">
+              <a:lnSpc>
+                <a:spcPct val="104000"/>
+              </a:lnSpc>
+              <a:buNone/>
+            </a:pPr>
+            <a:r>
+              <a:rPr lang="en-US" sz="1700" b="1" dirty="0">
+                <a:solidFill>
+                  <a:srgbClr val="1C1C1C"/>
+                </a:solidFill>
+                <a:latin typeface="Orbitron Bold" pitchFamily="34" charset="0"/>
+                <a:ea typeface="Orbitron Bold" pitchFamily="34" charset="-122"/>
+                <a:cs typeface="Orbitron Bold" pitchFamily="34" charset="-120"/>
+              </a:rPr>
               <a:t>Summary</a:t>
             </a:r>
             <a:endParaRPr lang="en-US" sz="1700" dirty="0"/>
@@ -5987,14 +6141,14 @@
       </p:sp>
       <p:sp>
         <p:nvSpPr>
-          <p:cNvPr id="15" name="Text 12"/>
-          <p:cNvSpPr/>
-          <p:nvPr/>
-        </p:nvSpPr>
-        <p:spPr>
-          <a:xfrm>
-            <a:off x="5426634" y="5585817"/>
-            <a:ext cx="5910313" cy="267791"/>
+          <p:cNvPr id="19" name="Text 12"/>
+          <p:cNvSpPr/>
+          <p:nvPr/>
+        </p:nvSpPr>
+        <p:spPr>
+          <a:xfrm>
+            <a:off x="6110035" y="5608439"/>
+            <a:ext cx="5226911" cy="267791"/>
           </a:xfrm>
           <a:prstGeom prst="rect">
             <a:avLst/>
@@ -6029,7 +6183,7 @@
       </p:sp>
       <p:sp>
         <p:nvSpPr>
-          <p:cNvPr id="16" name="Text 13"/>
+          <p:cNvPr id="20" name="Text 13"/>
           <p:cNvSpPr/>
           <p:nvPr/>
         </p:nvSpPr>
